--- a/modulo-04/04.00_Do_legado_à_agilidade_Clean_Core_no_S4HANA.pptx
+++ b/modulo-04/04.00_Do_legado_à_agilidade_Clean_Core_no_S4HANA.pptx
@@ -1194,7 +1194,7 @@
                   <a:srgbClr val="8FA3C7"/>
                 </a:solidFill>
               </a:rPr>
-              <a:t>ABAP Moderno · Módulo 05 — Extensibilidade Clean Core  ·  Visão geral do módulo</a:t>
+              <a:t>ABAP Moderno · Módulo 04 — Extensibilidade Clean Core  ·  Visão geral do módulo</a:t>
             </a:r>
             <a:endParaRPr lang="en-US" sz="900" dirty="0"/>
           </a:p>
@@ -1340,7 +1340,7 @@
                   <a:srgbClr val="556B82"/>
                 </a:solidFill>
               </a:rPr>
-              <a:t>ABAP Moderno · Módulo 05 — Extensibilidade Clean Core  ·  Visão geral do módulo</a:t>
+              <a:t>ABAP Moderno · Módulo 04 — Extensibilidade Clean Core  ·  Visão geral do módulo</a:t>
             </a:r>
             <a:endParaRPr lang="en-US" sz="900" dirty="0"/>
           </a:p>
@@ -1771,7 +1771,7 @@
                   <a:srgbClr val="89D1FF"/>
                 </a:solidFill>
               </a:rPr>
-              <a:t>MÓDULO 05 · VISÃO GERAL</a:t>
+              <a:t>MÓDULO 04 · VISÃO GERAL</a:t>
             </a:r>
             <a:endParaRPr lang="en-US" sz="1400" dirty="0"/>
           </a:p>
@@ -1843,7 +1843,7 @@
                   <a:srgbClr val="D1EFFF"/>
                 </a:solidFill>
               </a:rPr>
-              <a:t>Visão geral do módulo 05: por que o núcleo limpo importa, como estender o S/4HANA sem modificá-lo e como governar o código existente.</a:t>
+              <a:t>Visão geral do módulo 04: por que o núcleo limpo importa, como estender o S/4HANA sem modificá-lo e como governar o código existente.</a:t>
             </a:r>
             <a:endParaRPr lang="en-US" sz="1700" dirty="0"/>
           </a:p>
@@ -2069,7 +2069,7 @@
                   <a:srgbClr val="8FA3C7"/>
                 </a:solidFill>
               </a:rPr>
-              <a:t>ABAP Moderno · Módulo 05 — Extensibilidade Clean Core · Design System SAP Horizon</a:t>
+              <a:t>ABAP Moderno · Módulo 04 — Extensibilidade Clean Core · Design System SAP Horizon</a:t>
             </a:r>
             <a:endParaRPr lang="en-US" sz="1100" dirty="0"/>
           </a:p>
@@ -3108,8 +3108,8 @@
         </p:blipFill>
         <p:spPr>
           <a:xfrm>
-            <a:off x="2072579" y="1847088"/>
-            <a:ext cx="347472" cy="347472"/>
+            <a:off x="749808" y="5751576"/>
+            <a:ext cx="310896" cy="310896"/>
           </a:xfrm>
           <a:prstGeom prst="rect">
             <a:avLst/>
@@ -3132,7 +3132,7 @@
         </p:blipFill>
         <p:spPr>
           <a:xfrm>
-            <a:off x="4328038" y="1847088"/>
+            <a:off x="6583497" y="1847088"/>
             <a:ext cx="347472" cy="347472"/>
           </a:xfrm>
           <a:prstGeom prst="rect">
@@ -3156,7 +3156,7 @@
         </p:blipFill>
         <p:spPr>
           <a:xfrm>
-            <a:off x="8838956" y="1847088"/>
+            <a:off x="2072579" y="1847088"/>
             <a:ext cx="347472" cy="347472"/>
           </a:xfrm>
           <a:prstGeom prst="rect">
@@ -3180,7 +3180,7 @@
         </p:blipFill>
         <p:spPr>
           <a:xfrm>
-            <a:off x="6583497" y="1847088"/>
+            <a:off x="8838956" y="1847088"/>
             <a:ext cx="347472" cy="347472"/>
           </a:xfrm>
           <a:prstGeom prst="rect">
@@ -3204,8 +3204,8 @@
         </p:blipFill>
         <p:spPr>
           <a:xfrm>
-            <a:off x="749808" y="5751576"/>
-            <a:ext cx="310896" cy="310896"/>
+            <a:off x="11094415" y="1847088"/>
+            <a:ext cx="347472" cy="347472"/>
           </a:xfrm>
           <a:prstGeom prst="rect">
             <a:avLst/>
@@ -3228,7 +3228,7 @@
         </p:blipFill>
         <p:spPr>
           <a:xfrm>
-            <a:off x="11094415" y="1847088"/>
+            <a:off x="4328038" y="1847088"/>
             <a:ext cx="347472" cy="347472"/>
           </a:xfrm>
           <a:prstGeom prst="rect">
@@ -3996,7 +3996,7 @@
                   <a:srgbClr val="556B82"/>
                 </a:solidFill>
               </a:rPr>
-              <a:t>É o último módulo da ordem recomendada </a:t>
+              <a:t>É o último módulo da jornada </a:t>
             </a:r>
             <a:r>
               <a:rPr lang="en-US" sz="1200" b="1" dirty="0">
@@ -4004,7 +4004,7 @@
                   <a:srgbClr val="556B82"/>
                 </a:solidFill>
               </a:rPr>
-              <a:t>01 → 04 → 02 → 05</a:t>
+              <a:t>01 → 02 → 03 → 04</a:t>
             </a:r>
             <a:r>
               <a:rPr lang="en-US" sz="1200" dirty="0">
@@ -4660,7 +4660,7 @@
                   <a:srgbClr val="89D1FF"/>
                 </a:solidFill>
               </a:rPr>
-              <a:t>MÓDULO 05 · VISÃO GERAL · SEÇÃO 1</a:t>
+              <a:t>MÓDULO 04 · VISÃO GERAL · SEÇÃO 1</a:t>
             </a:r>
             <a:endParaRPr lang="en-US" sz="1300" dirty="0"/>
           </a:p>
@@ -4869,7 +4869,7 @@
                   <a:srgbClr val="D1EFFF"/>
                 </a:solidFill>
               </a:rPr>
-              <a:t>  05.01</a:t>
+              <a:t>  04.01</a:t>
             </a:r>
             <a:endParaRPr lang="en-US" sz="1400" dirty="0"/>
           </a:p>
@@ -4916,7 +4916,7 @@
                   <a:srgbClr val="D1EFFF"/>
                 </a:solidFill>
               </a:rPr>
-              <a:t>  05.02</a:t>
+              <a:t>  04.02</a:t>
             </a:r>
             <a:endParaRPr lang="en-US" sz="1400" dirty="0"/>
           </a:p>
@@ -4963,7 +4963,7 @@
                   <a:srgbClr val="D1EFFF"/>
                 </a:solidFill>
               </a:rPr>
-              <a:t>  05.03</a:t>
+              <a:t>  04.03</a:t>
             </a:r>
             <a:endParaRPr lang="en-US" sz="1400" dirty="0"/>
           </a:p>
@@ -5010,7 +5010,7 @@
                   <a:srgbClr val="D1EFFF"/>
                 </a:solidFill>
               </a:rPr>
-              <a:t>  05.04 · 05.05</a:t>
+              <a:t>  04.04 · 04.05</a:t>
             </a:r>
             <a:endParaRPr lang="en-US" sz="1400" dirty="0"/>
           </a:p>
@@ -5865,7 +5865,7 @@
                   <a:srgbClr val="0064D9"/>
                 </a:solidFill>
               </a:rPr>
-              <a:t>05.01</a:t>
+              <a:t>04.01</a:t>
             </a:r>
             <a:endParaRPr lang="en-US" sz="1000" dirty="0"/>
           </a:p>
@@ -6032,7 +6032,7 @@
                   <a:srgbClr val="0064D9"/>
                 </a:solidFill>
               </a:rPr>
-              <a:t>05.02</a:t>
+              <a:t>04.02</a:t>
             </a:r>
             <a:endParaRPr lang="en-US" sz="1000" dirty="0"/>
           </a:p>
@@ -6199,7 +6199,7 @@
                   <a:srgbClr val="0064D9"/>
                 </a:solidFill>
               </a:rPr>
-              <a:t>05.03</a:t>
+              <a:t>04.03</a:t>
             </a:r>
             <a:endParaRPr lang="en-US" sz="1000" dirty="0"/>
           </a:p>
@@ -6366,7 +6366,7 @@
                   <a:srgbClr val="0064D9"/>
                 </a:solidFill>
               </a:rPr>
-              <a:t>05.04</a:t>
+              <a:t>04.04</a:t>
             </a:r>
             <a:endParaRPr lang="en-US" sz="1000" dirty="0"/>
           </a:p>
@@ -6533,7 +6533,7 @@
                   <a:srgbClr val="0064D9"/>
                 </a:solidFill>
               </a:rPr>
-              <a:t>05.05</a:t>
+              <a:t>04.05</a:t>
             </a:r>
             <a:endParaRPr lang="en-US" sz="1000" dirty="0"/>
           </a:p>
@@ -6608,7 +6608,7 @@
         </p:blipFill>
         <p:spPr>
           <a:xfrm>
-            <a:off x="3114995" y="3193161"/>
+            <a:off x="7644201" y="3193161"/>
             <a:ext cx="256032" cy="256032"/>
           </a:xfrm>
           <a:prstGeom prst="rect">
@@ -6680,7 +6680,7 @@
         </p:blipFill>
         <p:spPr>
           <a:xfrm>
-            <a:off x="7644201" y="3193161"/>
+            <a:off x="3114995" y="3193161"/>
             <a:ext cx="256032" cy="256032"/>
           </a:xfrm>
           <a:prstGeom prst="rect">
@@ -7422,7 +7422,7 @@
                   <a:srgbClr val="89D1FF"/>
                 </a:solidFill>
               </a:rPr>
-              <a:t>Próxima aula · 05.01  </a:t>
+              <a:t>Próxima aula · 04.01  </a:t>
             </a:r>
             <a:r>
               <a:rPr lang="en-US" sz="1500" dirty="0">
@@ -7524,7 +7524,7 @@
         </p:blipFill>
         <p:spPr>
           <a:xfrm>
-            <a:off x="6355080" y="2926080"/>
+            <a:off x="822960" y="3886200"/>
             <a:ext cx="256032" cy="256032"/>
           </a:xfrm>
           <a:prstGeom prst="rect">
@@ -7548,7 +7548,7 @@
         </p:blipFill>
         <p:spPr>
           <a:xfrm>
-            <a:off x="822960" y="3886200"/>
+            <a:off x="6355080" y="2926080"/>
             <a:ext cx="256032" cy="256032"/>
           </a:xfrm>
           <a:prstGeom prst="rect">
